--- a/slides/20250703-foss4gnl-opensource-at-isric.pptx
+++ b/slides/20250703-foss4gnl-opensource-at-isric.pptx
@@ -4316,8 +4316,8 @@
         </p:blipFill>
         <p:spPr bwMode="auto">
           <a:xfrm>
-            <a:off x="2413000" y="1193800"/>
-            <a:ext cx="4318000" cy="2882900"/>
+            <a:off x="2400300" y="1193800"/>
+            <a:ext cx="4330700" cy="2882900"/>
           </a:xfrm>
           <a:prstGeom prst="rect">
             <a:avLst/>
@@ -4334,7 +4334,9 @@
         <p:nvSpPr>
           <p:cNvPr id="1" name="TextBox 3"/>
           <p:cNvSpPr txBox="1"/>
-          <p:nvPr/>
+          <p:nvPr>
+            <p:ph idx="1"/>
+          </p:nvPr>
         </p:nvSpPr>
         <p:spPr>
           <a:xfrm>

--- a/slides/20250703-foss4gnl-opensource-at-isric.pptx
+++ b/slides/20250703-foss4gnl-opensource-at-isric.pptx
@@ -4316,8 +4316,8 @@
         </p:blipFill>
         <p:spPr bwMode="auto">
           <a:xfrm>
-            <a:off x="2400300" y="1193800"/>
-            <a:ext cx="4330700" cy="2882900"/>
+            <a:off x="2413000" y="1193800"/>
+            <a:ext cx="4318000" cy="2882900"/>
           </a:xfrm>
           <a:prstGeom prst="rect">
             <a:avLst/>

--- a/slides/20250703-foss4gnl-opensource-at-isric.pptx
+++ b/slides/20250703-foss4gnl-opensource-at-isric.pptx
@@ -4316,8 +4316,8 @@
         </p:blipFill>
         <p:spPr bwMode="auto">
           <a:xfrm>
-            <a:off x="2413000" y="1193800"/>
-            <a:ext cx="4318000" cy="2882900"/>
+            <a:off x="2400300" y="1193800"/>
+            <a:ext cx="4330700" cy="2882900"/>
           </a:xfrm>
           <a:prstGeom prst="rect">
             <a:avLst/>
